--- a/KHBD_Tin_học/Lớp_6/Bài_01/Slide_Tin_hoc_Lop_6_Bai01_THÔNG_TIN_VÀ_DỮ_LIỆU.pptx
+++ b/KHBD_Tin_học/Lớp_6/Bài_01/Slide_Tin_hoc_Lop_6_Bai01_THÔNG_TIN_VÀ_DỮ_LIỆU.pptx
@@ -3103,16 +3103,85 @@
         <p:nvPr/>
       </p:nvGrpSpPr>
       <p:grpSpPr/>
-      <p:sp>
-        <p:nvSpPr>
-          <p:cNvPr id="2" name="Rounded Rectangle 1"/>
+      <p:pic>
+        <p:nvPicPr>
+          <p:cNvPr id="2" name="Picture 1" descr="bai1_page11.png"/>
+          <p:cNvPicPr>
+            <a:picLocks noChangeAspect="1"/>
+          </p:cNvPicPr>
+          <p:nvPr/>
+        </p:nvPicPr>
+        <p:blipFill>
+          <a:blip r:embed="rId2"/>
+          <a:stretch>
+            <a:fillRect/>
+          </a:stretch>
+        </p:blipFill>
+        <p:spPr>
+          <a:xfrm>
+            <a:off x="7804773" y="1188720"/>
+            <a:ext cx="3196614" cy="4572000"/>
+          </a:xfrm>
+          <a:prstGeom prst="rect">
+            <a:avLst/>
+          </a:prstGeom>
+        </p:spPr>
+      </p:pic>
+      <p:sp>
+        <p:nvSpPr>
+          <p:cNvPr id="3" name="Rounded Rectangle 2"/>
           <p:cNvSpPr/>
           <p:nvPr/>
         </p:nvSpPr>
         <p:spPr>
           <a:xfrm>
-            <a:off x="1524000" y="1280160"/>
-            <a:ext cx="9144000" cy="4206240"/>
+            <a:off x="6797040" y="1097280"/>
+            <a:ext cx="5212080" cy="4754880"/>
+          </a:xfrm>
+          <a:prstGeom prst="roundRect">
+            <a:avLst>
+              <a:gd name="adj" fmla="val 3000"/>
+            </a:avLst>
+          </a:prstGeom>
+          <a:noFill/>
+          <a:ln w="38100">
+            <a:solidFill>
+              <a:srgbClr val="FFD54F"/>
+            </a:solidFill>
+          </a:ln>
+        </p:spPr>
+        <p:style>
+          <a:lnRef idx="1">
+            <a:schemeClr val="accent1"/>
+          </a:lnRef>
+          <a:fillRef idx="3">
+            <a:schemeClr val="accent1"/>
+          </a:fillRef>
+          <a:effectRef idx="2">
+            <a:schemeClr val="accent1"/>
+          </a:effectRef>
+          <a:fontRef idx="minor">
+            <a:schemeClr val="lt1"/>
+          </a:fontRef>
+        </p:style>
+        <p:txBody>
+          <a:bodyPr rtlCol="0" anchor="ctr"/>
+          <a:lstStyle/>
+          <a:p>
+            <a:pPr algn="ctr"/>
+          </a:p>
+        </p:txBody>
+      </p:sp>
+      <p:sp>
+        <p:nvSpPr>
+          <p:cNvPr id="4" name="Rounded Rectangle 3"/>
+          <p:cNvSpPr/>
+          <p:nvPr/>
+        </p:nvSpPr>
+        <p:spPr>
+          <a:xfrm>
+            <a:off x="365760" y="1280160"/>
+            <a:ext cx="6858000" cy="4206240"/>
           </a:xfrm>
           <a:prstGeom prst="roundRect">
             <a:avLst>
@@ -3150,13 +3219,13 @@
       </p:sp>
       <p:sp>
         <p:nvSpPr>
-          <p:cNvPr id="3" name="Rounded Rectangle 2"/>
+          <p:cNvPr id="5" name="Rounded Rectangle 4"/>
           <p:cNvSpPr/>
           <p:nvPr/>
         </p:nvSpPr>
         <p:spPr>
           <a:xfrm>
-            <a:off x="1981200" y="1554480"/>
+            <a:off x="822960" y="1554480"/>
             <a:ext cx="4114800" cy="457200"/>
           </a:xfrm>
           <a:prstGeom prst="roundRect">
@@ -3204,14 +3273,14 @@
       </p:sp>
       <p:sp>
         <p:nvSpPr>
-          <p:cNvPr id="4" name="TextBox 3"/>
+          <p:cNvPr id="6" name="TextBox 5"/>
           <p:cNvSpPr txBox="1"/>
           <p:nvPr/>
         </p:nvSpPr>
         <p:spPr>
           <a:xfrm>
-            <a:off x="1981200" y="2286000"/>
-            <a:ext cx="8229600" cy="2011680"/>
+            <a:off x="822960" y="2286000"/>
+            <a:ext cx="5943600" cy="2011680"/>
           </a:xfrm>
           <a:prstGeom prst="rect">
             <a:avLst/>
@@ -3270,14 +3339,14 @@
       </p:sp>
       <p:sp>
         <p:nvSpPr>
-          <p:cNvPr id="5" name="TextBox 4"/>
+          <p:cNvPr id="7" name="TextBox 6"/>
           <p:cNvSpPr txBox="1"/>
           <p:nvPr/>
         </p:nvSpPr>
         <p:spPr>
           <a:xfrm>
-            <a:off x="1981200" y="4389120"/>
-            <a:ext cx="8229600" cy="914400"/>
+            <a:off x="822960" y="4389120"/>
+            <a:ext cx="5943600" cy="914400"/>
           </a:xfrm>
           <a:prstGeom prst="rect">
             <a:avLst/>
@@ -3315,7 +3384,7 @@
       </p:sp>
       <p:sp>
         <p:nvSpPr>
-          <p:cNvPr id="6" name="Rectangle 5"/>
+          <p:cNvPr id="8" name="Rectangle 7"/>
           <p:cNvSpPr/>
           <p:nvPr/>
         </p:nvSpPr>
@@ -3358,7 +3427,7 @@
       </p:sp>
       <p:sp>
         <p:nvSpPr>
-          <p:cNvPr id="7" name="TextBox 6"/>
+          <p:cNvPr id="9" name="TextBox 8"/>
           <p:cNvSpPr txBox="1"/>
           <p:nvPr/>
         </p:nvSpPr>
@@ -3425,8 +3494,8 @@
         </p:nvSpPr>
         <p:spPr>
           <a:xfrm>
-            <a:off x="838200" y="1188720"/>
-            <a:ext cx="10515600" cy="4389120"/>
+            <a:off x="320040" y="1188720"/>
+            <a:ext cx="7132320" cy="4389120"/>
           </a:xfrm>
           <a:prstGeom prst="roundRect">
             <a:avLst>
@@ -3477,7 +3546,7 @@
         </p:nvSpPr>
         <p:spPr>
           <a:xfrm>
-            <a:off x="838200" y="1188720"/>
+            <a:off x="320040" y="1188720"/>
             <a:ext cx="109728" cy="4389120"/>
           </a:xfrm>
           <a:prstGeom prst="rect">
@@ -3520,8 +3589,8 @@
         </p:nvSpPr>
         <p:spPr>
           <a:xfrm>
-            <a:off x="1295400" y="1371600"/>
-            <a:ext cx="9144000" cy="457200"/>
+            <a:off x="777240" y="1371600"/>
+            <a:ext cx="6400800" cy="457200"/>
           </a:xfrm>
           <a:prstGeom prst="rect">
             <a:avLst/>
@@ -3556,8 +3625,8 @@
         </p:nvSpPr>
         <p:spPr>
           <a:xfrm>
-            <a:off x="1295400" y="2011680"/>
-            <a:ext cx="9601200" cy="3291840"/>
+            <a:off x="777240" y="2011680"/>
+            <a:ext cx="6400800" cy="3291840"/>
           </a:xfrm>
           <a:prstGeom prst="rect">
             <a:avLst/>
@@ -3655,9 +3724,33 @@
           </a:p>
         </p:txBody>
       </p:sp>
-      <p:sp>
-        <p:nvSpPr>
-          <p:cNvPr id="6" name="Rectangle 5"/>
+      <p:pic>
+        <p:nvPicPr>
+          <p:cNvPr id="6" name="Picture 5" descr="bai1_page11.png"/>
+          <p:cNvPicPr>
+            <a:picLocks noChangeAspect="1"/>
+          </p:cNvPicPr>
+          <p:nvPr/>
+        </p:nvPicPr>
+        <p:blipFill>
+          <a:blip r:embed="rId2"/>
+          <a:stretch>
+            <a:fillRect/>
+          </a:stretch>
+        </p:blipFill>
+        <p:spPr>
+          <a:xfrm>
+            <a:off x="8242085" y="1188720"/>
+            <a:ext cx="3068749" cy="4389120"/>
+          </a:xfrm>
+          <a:prstGeom prst="rect">
+            <a:avLst/>
+          </a:prstGeom>
+        </p:spPr>
+      </p:pic>
+      <p:sp>
+        <p:nvSpPr>
+          <p:cNvPr id="7" name="Rectangle 6"/>
           <p:cNvSpPr/>
           <p:nvPr/>
         </p:nvSpPr>
@@ -3700,7 +3793,7 @@
       </p:sp>
       <p:sp>
         <p:nvSpPr>
-          <p:cNvPr id="7" name="TextBox 6"/>
+          <p:cNvPr id="8" name="TextBox 7"/>
           <p:cNvSpPr txBox="1"/>
           <p:nvPr/>
         </p:nvSpPr>
@@ -3767,8 +3860,8 @@
         </p:nvSpPr>
         <p:spPr>
           <a:xfrm>
-            <a:off x="457200" y="1188720"/>
-            <a:ext cx="6858000" cy="4389120"/>
+            <a:off x="320040" y="1188720"/>
+            <a:ext cx="6400800" cy="4389120"/>
           </a:xfrm>
           <a:prstGeom prst="roundRect">
             <a:avLst>
@@ -3819,7 +3912,7 @@
         </p:nvSpPr>
         <p:spPr>
           <a:xfrm>
-            <a:off x="457200" y="1188720"/>
+            <a:off x="320040" y="1188720"/>
             <a:ext cx="109728" cy="4389120"/>
           </a:xfrm>
           <a:prstGeom prst="rect">
@@ -3862,8 +3955,8 @@
         </p:nvSpPr>
         <p:spPr>
           <a:xfrm>
-            <a:off x="822960" y="1371600"/>
-            <a:ext cx="6126480" cy="457200"/>
+            <a:off x="685800" y="1371600"/>
+            <a:ext cx="5669280" cy="457200"/>
           </a:xfrm>
           <a:prstGeom prst="rect">
             <a:avLst/>
@@ -3898,8 +3991,8 @@
         </p:nvSpPr>
         <p:spPr>
           <a:xfrm>
-            <a:off x="822960" y="2011680"/>
-            <a:ext cx="6126480" cy="3291840"/>
+            <a:off x="685800" y="2011680"/>
+            <a:ext cx="5669280" cy="3291840"/>
           </a:xfrm>
           <a:prstGeom prst="rect">
             <a:avLst/>
@@ -4033,21 +4126,21 @@
         </p:nvSpPr>
         <p:spPr>
           <a:xfrm>
-            <a:off x="7437120" y="1188720"/>
-            <a:ext cx="4389120" cy="4389120"/>
+            <a:off x="6949440" y="1188720"/>
+            <a:ext cx="4922520" cy="4389120"/>
           </a:xfrm>
           <a:prstGeom prst="roundRect">
             <a:avLst>
-              <a:gd name="adj" fmla="val 4000"/>
+              <a:gd name="adj" fmla="val 3000"/>
             </a:avLst>
           </a:prstGeom>
           <a:solidFill>
-            <a:srgbClr val="009688">
-              <a:alpha val="20000"/>
-            </a:srgbClr>
+            <a:srgbClr val="F8F8F8"/>
           </a:solidFill>
-          <a:ln>
-            <a:noFill/>
+          <a:ln w="19050">
+            <a:solidFill>
+              <a:srgbClr val="009688"/>
+            </a:solidFill>
           </a:ln>
         </p:spPr>
         <p:style>
@@ -4072,45 +4165,87 @@
           </a:p>
         </p:txBody>
       </p:sp>
-      <p:sp>
-        <p:nvSpPr>
-          <p:cNvPr id="7" name="TextBox 6"/>
-          <p:cNvSpPr txBox="1"/>
+      <p:pic>
+        <p:nvPicPr>
+          <p:cNvPr id="7" name="Picture 6" descr="bai1_page11.png"/>
+          <p:cNvPicPr>
+            <a:picLocks noChangeAspect="1"/>
+          </p:cNvPicPr>
           <p:nvPr/>
-        </p:nvSpPr>
-        <p:spPr>
-          <a:xfrm>
-            <a:off x="9174480" y="2926080"/>
-            <a:ext cx="914400" cy="914400"/>
+        </p:nvPicPr>
+        <p:blipFill>
+          <a:blip r:embed="rId2"/>
+          <a:stretch>
+            <a:fillRect/>
+          </a:stretch>
+        </p:blipFill>
+        <p:spPr>
+          <a:xfrm>
+            <a:off x="7972223" y="1325880"/>
+            <a:ext cx="2876953" cy="4114800"/>
           </a:xfrm>
           <a:prstGeom prst="rect">
             <a:avLst/>
           </a:prstGeom>
-          <a:noFill/>
-        </p:spPr>
-        <p:txBody>
-          <a:bodyPr wrap="square">
-            <a:spAutoFit/>
-          </a:bodyPr>
-          <a:lstStyle/>
-          <a:p>
-            <a:pPr algn="ctr">
-              <a:defRPr sz="4800" b="0">
+        </p:spPr>
+      </p:pic>
+      <p:sp>
+        <p:nvSpPr>
+          <p:cNvPr id="8" name="Rounded Rectangle 7"/>
+          <p:cNvSpPr/>
+          <p:nvPr/>
+        </p:nvSpPr>
+        <p:spPr>
+          <a:xfrm>
+            <a:off x="10683240" y="1280160"/>
+            <a:ext cx="1097280" cy="274320"/>
+          </a:xfrm>
+          <a:prstGeom prst="roundRect">
+            <a:avLst>
+              <a:gd name="adj" fmla="val 30000"/>
+            </a:avLst>
+          </a:prstGeom>
+          <a:solidFill>
+            <a:srgbClr val="009688"/>
+          </a:solidFill>
+          <a:ln>
+            <a:noFill/>
+          </a:ln>
+        </p:spPr>
+        <p:style>
+          <a:lnRef idx="1">
+            <a:schemeClr val="accent1"/>
+          </a:lnRef>
+          <a:fillRef idx="3">
+            <a:schemeClr val="accent1"/>
+          </a:fillRef>
+          <a:effectRef idx="2">
+            <a:schemeClr val="accent1"/>
+          </a:effectRef>
+          <a:fontRef idx="minor">
+            <a:schemeClr val="lt1"/>
+          </a:fontRef>
+        </p:style>
+        <p:txBody>
+          <a:bodyPr rtlCol="0" anchor="ctr"/>
+          <a:lstStyle/>
+          <a:p>
+            <a:pPr algn="ctr"/>
+            <a:r>
+              <a:rPr sz="1000" b="1">
                 <a:solidFill>
                   <a:srgbClr val="FFFFFF"/>
                 </a:solidFill>
                 <a:latin typeface="Times New Roman"/>
-              </a:defRPr>
-            </a:pPr>
-            <a:r>
-              <a:t>🎮</a:t>
-            </a:r>
-          </a:p>
-        </p:txBody>
-      </p:sp>
-      <p:sp>
-        <p:nvSpPr>
-          <p:cNvPr id="8" name="Rectangle 7"/>
+              </a:rPr>
+              <a:t>📚 SGK</a:t>
+            </a:r>
+          </a:p>
+        </p:txBody>
+      </p:sp>
+      <p:sp>
+        <p:nvSpPr>
+          <p:cNvPr id="9" name="Rectangle 8"/>
           <p:cNvSpPr/>
           <p:nvPr/>
         </p:nvSpPr>
@@ -4153,7 +4288,7 @@
       </p:sp>
       <p:sp>
         <p:nvSpPr>
-          <p:cNvPr id="9" name="TextBox 8"/>
+          <p:cNvPr id="10" name="TextBox 9"/>
           <p:cNvSpPr txBox="1"/>
           <p:nvPr/>
         </p:nvSpPr>
@@ -4220,8 +4355,8 @@
         </p:nvSpPr>
         <p:spPr>
           <a:xfrm>
-            <a:off x="4876800" y="1188720"/>
-            <a:ext cx="6858000" cy="4389120"/>
+            <a:off x="5577840" y="1188720"/>
+            <a:ext cx="6400800" cy="4389120"/>
           </a:xfrm>
           <a:prstGeom prst="roundRect">
             <a:avLst>
@@ -4272,7 +4407,7 @@
         </p:nvSpPr>
         <p:spPr>
           <a:xfrm>
-            <a:off x="11625072" y="1188720"/>
+            <a:off x="11868912" y="1188720"/>
             <a:ext cx="109728" cy="4389120"/>
           </a:xfrm>
           <a:prstGeom prst="rect">
@@ -4315,8 +4450,8 @@
         </p:nvSpPr>
         <p:spPr>
           <a:xfrm>
-            <a:off x="5242560" y="1371600"/>
-            <a:ext cx="6126480" cy="457200"/>
+            <a:off x="5943600" y="1371600"/>
+            <a:ext cx="5669280" cy="457200"/>
           </a:xfrm>
           <a:prstGeom prst="rect">
             <a:avLst/>
@@ -4351,8 +4486,8 @@
         </p:nvSpPr>
         <p:spPr>
           <a:xfrm>
-            <a:off x="5242560" y="2011680"/>
-            <a:ext cx="6126480" cy="3291840"/>
+            <a:off x="5943600" y="2011680"/>
+            <a:ext cx="5669280" cy="3291840"/>
           </a:xfrm>
           <a:prstGeom prst="rect">
             <a:avLst/>
@@ -4486,21 +4621,21 @@
         </p:nvSpPr>
         <p:spPr>
           <a:xfrm>
-            <a:off x="457200" y="1188720"/>
-            <a:ext cx="4389120" cy="4389120"/>
+            <a:off x="320040" y="1188720"/>
+            <a:ext cx="5029200" cy="4389120"/>
           </a:xfrm>
           <a:prstGeom prst="roundRect">
             <a:avLst>
-              <a:gd name="adj" fmla="val 4000"/>
+              <a:gd name="adj" fmla="val 3000"/>
             </a:avLst>
           </a:prstGeom>
           <a:solidFill>
-            <a:srgbClr val="009688">
-              <a:alpha val="20000"/>
-            </a:srgbClr>
+            <a:srgbClr val="F8F8F8"/>
           </a:solidFill>
-          <a:ln>
-            <a:noFill/>
+          <a:ln w="19050">
+            <a:solidFill>
+              <a:srgbClr val="009688"/>
+            </a:solidFill>
           </a:ln>
         </p:spPr>
         <p:style>
@@ -4525,45 +4660,87 @@
           </a:p>
         </p:txBody>
       </p:sp>
-      <p:sp>
-        <p:nvSpPr>
-          <p:cNvPr id="7" name="TextBox 6"/>
-          <p:cNvSpPr txBox="1"/>
+      <p:pic>
+        <p:nvPicPr>
+          <p:cNvPr id="7" name="Picture 6" descr="bai1_page12.png"/>
+          <p:cNvPicPr>
+            <a:picLocks noChangeAspect="1"/>
+          </p:cNvPicPr>
           <p:nvPr/>
-        </p:nvSpPr>
-        <p:spPr>
-          <a:xfrm>
-            <a:off x="2194560" y="2926080"/>
-            <a:ext cx="914400" cy="914400"/>
+        </p:nvPicPr>
+        <p:blipFill>
+          <a:blip r:embed="rId2"/>
+          <a:stretch>
+            <a:fillRect/>
+          </a:stretch>
+        </p:blipFill>
+        <p:spPr>
+          <a:xfrm>
+            <a:off x="1396163" y="1325880"/>
+            <a:ext cx="2876953" cy="4114800"/>
           </a:xfrm>
           <a:prstGeom prst="rect">
             <a:avLst/>
           </a:prstGeom>
-          <a:noFill/>
-        </p:spPr>
-        <p:txBody>
-          <a:bodyPr wrap="square">
-            <a:spAutoFit/>
-          </a:bodyPr>
-          <a:lstStyle/>
-          <a:p>
-            <a:pPr algn="ctr">
-              <a:defRPr sz="4800" b="0">
+        </p:spPr>
+      </p:pic>
+      <p:sp>
+        <p:nvSpPr>
+          <p:cNvPr id="8" name="Rounded Rectangle 7"/>
+          <p:cNvSpPr/>
+          <p:nvPr/>
+        </p:nvSpPr>
+        <p:spPr>
+          <a:xfrm>
+            <a:off x="4160520" y="1280160"/>
+            <a:ext cx="1097280" cy="274320"/>
+          </a:xfrm>
+          <a:prstGeom prst="roundRect">
+            <a:avLst>
+              <a:gd name="adj" fmla="val 30000"/>
+            </a:avLst>
+          </a:prstGeom>
+          <a:solidFill>
+            <a:srgbClr val="009688"/>
+          </a:solidFill>
+          <a:ln>
+            <a:noFill/>
+          </a:ln>
+        </p:spPr>
+        <p:style>
+          <a:lnRef idx="1">
+            <a:schemeClr val="accent1"/>
+          </a:lnRef>
+          <a:fillRef idx="3">
+            <a:schemeClr val="accent1"/>
+          </a:fillRef>
+          <a:effectRef idx="2">
+            <a:schemeClr val="accent1"/>
+          </a:effectRef>
+          <a:fontRef idx="minor">
+            <a:schemeClr val="lt1"/>
+          </a:fontRef>
+        </p:style>
+        <p:txBody>
+          <a:bodyPr rtlCol="0" anchor="ctr"/>
+          <a:lstStyle/>
+          <a:p>
+            <a:pPr algn="ctr"/>
+            <a:r>
+              <a:rPr sz="1000" b="1">
                 <a:solidFill>
                   <a:srgbClr val="FFFFFF"/>
                 </a:solidFill>
                 <a:latin typeface="Times New Roman"/>
-              </a:defRPr>
-            </a:pPr>
-            <a:r>
-              <a:t>📖</a:t>
-            </a:r>
-          </a:p>
-        </p:txBody>
-      </p:sp>
-      <p:sp>
-        <p:nvSpPr>
-          <p:cNvPr id="8" name="Rectangle 7"/>
+              </a:rPr>
+              <a:t>📚 SGK</a:t>
+            </a:r>
+          </a:p>
+        </p:txBody>
+      </p:sp>
+      <p:sp>
+        <p:nvSpPr>
+          <p:cNvPr id="9" name="Rectangle 8"/>
           <p:cNvSpPr/>
           <p:nvPr/>
         </p:nvSpPr>
@@ -4606,7 +4783,7 @@
       </p:sp>
       <p:sp>
         <p:nvSpPr>
-          <p:cNvPr id="9" name="TextBox 8"/>
+          <p:cNvPr id="10" name="TextBox 9"/>
           <p:cNvSpPr txBox="1"/>
           <p:nvPr/>
         </p:nvSpPr>
@@ -4673,8 +4850,8 @@
         </p:nvSpPr>
         <p:spPr>
           <a:xfrm>
-            <a:off x="4876800" y="1188720"/>
-            <a:ext cx="6858000" cy="4389120"/>
+            <a:off x="5577840" y="1188720"/>
+            <a:ext cx="6400800" cy="4389120"/>
           </a:xfrm>
           <a:prstGeom prst="roundRect">
             <a:avLst>
@@ -4725,7 +4902,7 @@
         </p:nvSpPr>
         <p:spPr>
           <a:xfrm>
-            <a:off x="11625072" y="1188720"/>
+            <a:off x="11868912" y="1188720"/>
             <a:ext cx="109728" cy="4389120"/>
           </a:xfrm>
           <a:prstGeom prst="rect">
@@ -4768,8 +4945,8 @@
         </p:nvSpPr>
         <p:spPr>
           <a:xfrm>
-            <a:off x="5242560" y="1371600"/>
-            <a:ext cx="6126480" cy="457200"/>
+            <a:off x="5943600" y="1371600"/>
+            <a:ext cx="5669280" cy="457200"/>
           </a:xfrm>
           <a:prstGeom prst="rect">
             <a:avLst/>
@@ -4804,8 +4981,8 @@
         </p:nvSpPr>
         <p:spPr>
           <a:xfrm>
-            <a:off x="5242560" y="2011680"/>
-            <a:ext cx="6126480" cy="3291840"/>
+            <a:off x="5943600" y="2011680"/>
+            <a:ext cx="5669280" cy="3291840"/>
           </a:xfrm>
           <a:prstGeom prst="rect">
             <a:avLst/>
@@ -4939,21 +5116,21 @@
         </p:nvSpPr>
         <p:spPr>
           <a:xfrm>
-            <a:off x="457200" y="1188720"/>
-            <a:ext cx="4389120" cy="4389120"/>
+            <a:off x="320040" y="1188720"/>
+            <a:ext cx="5029200" cy="4389120"/>
           </a:xfrm>
           <a:prstGeom prst="roundRect">
             <a:avLst>
-              <a:gd name="adj" fmla="val 4000"/>
+              <a:gd name="adj" fmla="val 3000"/>
             </a:avLst>
           </a:prstGeom>
           <a:solidFill>
-            <a:srgbClr val="009688">
-              <a:alpha val="20000"/>
-            </a:srgbClr>
+            <a:srgbClr val="F8F8F8"/>
           </a:solidFill>
-          <a:ln>
-            <a:noFill/>
+          <a:ln w="19050">
+            <a:solidFill>
+              <a:srgbClr val="009688"/>
+            </a:solidFill>
           </a:ln>
         </p:spPr>
         <p:style>
@@ -4978,45 +5155,87 @@
           </a:p>
         </p:txBody>
       </p:sp>
-      <p:sp>
-        <p:nvSpPr>
-          <p:cNvPr id="7" name="TextBox 6"/>
-          <p:cNvSpPr txBox="1"/>
+      <p:pic>
+        <p:nvPicPr>
+          <p:cNvPr id="7" name="Picture 6" descr="bai1_page7.png"/>
+          <p:cNvPicPr>
+            <a:picLocks noChangeAspect="1"/>
+          </p:cNvPicPr>
           <p:nvPr/>
-        </p:nvSpPr>
-        <p:spPr>
-          <a:xfrm>
-            <a:off x="2194560" y="2926080"/>
-            <a:ext cx="914400" cy="914400"/>
+        </p:nvPicPr>
+        <p:blipFill>
+          <a:blip r:embed="rId2"/>
+          <a:stretch>
+            <a:fillRect/>
+          </a:stretch>
+        </p:blipFill>
+        <p:spPr>
+          <a:xfrm>
+            <a:off x="1396163" y="1325880"/>
+            <a:ext cx="2876953" cy="4114800"/>
           </a:xfrm>
           <a:prstGeom prst="rect">
             <a:avLst/>
           </a:prstGeom>
-          <a:noFill/>
-        </p:spPr>
-        <p:txBody>
-          <a:bodyPr wrap="square">
-            <a:spAutoFit/>
-          </a:bodyPr>
-          <a:lstStyle/>
-          <a:p>
-            <a:pPr algn="ctr">
-              <a:defRPr sz="4800" b="0">
+        </p:spPr>
+      </p:pic>
+      <p:sp>
+        <p:nvSpPr>
+          <p:cNvPr id="8" name="Rounded Rectangle 7"/>
+          <p:cNvSpPr/>
+          <p:nvPr/>
+        </p:nvSpPr>
+        <p:spPr>
+          <a:xfrm>
+            <a:off x="4160520" y="1280160"/>
+            <a:ext cx="1097280" cy="274320"/>
+          </a:xfrm>
+          <a:prstGeom prst="roundRect">
+            <a:avLst>
+              <a:gd name="adj" fmla="val 30000"/>
+            </a:avLst>
+          </a:prstGeom>
+          <a:solidFill>
+            <a:srgbClr val="009688"/>
+          </a:solidFill>
+          <a:ln>
+            <a:noFill/>
+          </a:ln>
+        </p:spPr>
+        <p:style>
+          <a:lnRef idx="1">
+            <a:schemeClr val="accent1"/>
+          </a:lnRef>
+          <a:fillRef idx="3">
+            <a:schemeClr val="accent1"/>
+          </a:fillRef>
+          <a:effectRef idx="2">
+            <a:schemeClr val="accent1"/>
+          </a:effectRef>
+          <a:fontRef idx="minor">
+            <a:schemeClr val="lt1"/>
+          </a:fontRef>
+        </p:style>
+        <p:txBody>
+          <a:bodyPr rtlCol="0" anchor="ctr"/>
+          <a:lstStyle/>
+          <a:p>
+            <a:pPr algn="ctr"/>
+            <a:r>
+              <a:rPr sz="1000" b="1">
                 <a:solidFill>
                   <a:srgbClr val="FFFFFF"/>
                 </a:solidFill>
                 <a:latin typeface="Times New Roman"/>
-              </a:defRPr>
-            </a:pPr>
-            <a:r>
-              <a:t>✏️</a:t>
-            </a:r>
-          </a:p>
-        </p:txBody>
-      </p:sp>
-      <p:sp>
-        <p:nvSpPr>
-          <p:cNvPr id="8" name="Rectangle 7"/>
+              </a:rPr>
+              <a:t>📚 SGK</a:t>
+            </a:r>
+          </a:p>
+        </p:txBody>
+      </p:sp>
+      <p:sp>
+        <p:nvSpPr>
+          <p:cNvPr id="9" name="Rectangle 8"/>
           <p:cNvSpPr/>
           <p:nvPr/>
         </p:nvSpPr>
@@ -5059,7 +5278,7 @@
       </p:sp>
       <p:sp>
         <p:nvSpPr>
-          <p:cNvPr id="9" name="TextBox 8"/>
+          <p:cNvPr id="10" name="TextBox 9"/>
           <p:cNvSpPr txBox="1"/>
           <p:nvPr/>
         </p:nvSpPr>
@@ -5126,8 +5345,8 @@
         </p:nvSpPr>
         <p:spPr>
           <a:xfrm>
-            <a:off x="457200" y="1188720"/>
-            <a:ext cx="6858000" cy="4389120"/>
+            <a:off x="320040" y="1188720"/>
+            <a:ext cx="6400800" cy="4389120"/>
           </a:xfrm>
           <a:prstGeom prst="roundRect">
             <a:avLst>
@@ -5178,7 +5397,7 @@
         </p:nvSpPr>
         <p:spPr>
           <a:xfrm>
-            <a:off x="457200" y="1188720"/>
+            <a:off x="320040" y="1188720"/>
             <a:ext cx="109728" cy="4389120"/>
           </a:xfrm>
           <a:prstGeom prst="rect">
@@ -5221,8 +5440,8 @@
         </p:nvSpPr>
         <p:spPr>
           <a:xfrm>
-            <a:off x="822960" y="1371600"/>
-            <a:ext cx="6126480" cy="457200"/>
+            <a:off x="685800" y="1371600"/>
+            <a:ext cx="5669280" cy="457200"/>
           </a:xfrm>
           <a:prstGeom prst="rect">
             <a:avLst/>
@@ -5257,8 +5476,8 @@
         </p:nvSpPr>
         <p:spPr>
           <a:xfrm>
-            <a:off x="822960" y="2011680"/>
-            <a:ext cx="6126480" cy="3291840"/>
+            <a:off x="685800" y="2011680"/>
+            <a:ext cx="5669280" cy="3291840"/>
           </a:xfrm>
           <a:prstGeom prst="rect">
             <a:avLst/>
@@ -5392,21 +5611,21 @@
         </p:nvSpPr>
         <p:spPr>
           <a:xfrm>
-            <a:off x="7437120" y="1188720"/>
-            <a:ext cx="4389120" cy="4389120"/>
+            <a:off x="6949440" y="1188720"/>
+            <a:ext cx="4922520" cy="4389120"/>
           </a:xfrm>
           <a:prstGeom prst="roundRect">
             <a:avLst>
-              <a:gd name="adj" fmla="val 4000"/>
+              <a:gd name="adj" fmla="val 3000"/>
             </a:avLst>
           </a:prstGeom>
           <a:solidFill>
-            <a:srgbClr val="009688">
-              <a:alpha val="20000"/>
-            </a:srgbClr>
+            <a:srgbClr val="F8F8F8"/>
           </a:solidFill>
-          <a:ln>
-            <a:noFill/>
+          <a:ln w="19050">
+            <a:solidFill>
+              <a:srgbClr val="009688"/>
+            </a:solidFill>
           </a:ln>
         </p:spPr>
         <p:style>
@@ -5431,45 +5650,87 @@
           </a:p>
         </p:txBody>
       </p:sp>
-      <p:sp>
-        <p:nvSpPr>
-          <p:cNvPr id="7" name="TextBox 6"/>
-          <p:cNvSpPr txBox="1"/>
+      <p:pic>
+        <p:nvPicPr>
+          <p:cNvPr id="7" name="Picture 6" descr="bai1_page8.png"/>
+          <p:cNvPicPr>
+            <a:picLocks noChangeAspect="1"/>
+          </p:cNvPicPr>
           <p:nvPr/>
-        </p:nvSpPr>
-        <p:spPr>
-          <a:xfrm>
-            <a:off x="9174480" y="2926080"/>
-            <a:ext cx="914400" cy="914400"/>
+        </p:nvPicPr>
+        <p:blipFill>
+          <a:blip r:embed="rId2"/>
+          <a:stretch>
+            <a:fillRect/>
+          </a:stretch>
+        </p:blipFill>
+        <p:spPr>
+          <a:xfrm>
+            <a:off x="7972223" y="1325880"/>
+            <a:ext cx="2876953" cy="4114800"/>
           </a:xfrm>
           <a:prstGeom prst="rect">
             <a:avLst/>
           </a:prstGeom>
-          <a:noFill/>
-        </p:spPr>
-        <p:txBody>
-          <a:bodyPr wrap="square">
-            <a:spAutoFit/>
-          </a:bodyPr>
-          <a:lstStyle/>
-          <a:p>
-            <a:pPr algn="ctr">
-              <a:defRPr sz="4800" b="0">
+        </p:spPr>
+      </p:pic>
+      <p:sp>
+        <p:nvSpPr>
+          <p:cNvPr id="8" name="Rounded Rectangle 7"/>
+          <p:cNvSpPr/>
+          <p:nvPr/>
+        </p:nvSpPr>
+        <p:spPr>
+          <a:xfrm>
+            <a:off x="10683240" y="1280160"/>
+            <a:ext cx="1097280" cy="274320"/>
+          </a:xfrm>
+          <a:prstGeom prst="roundRect">
+            <a:avLst>
+              <a:gd name="adj" fmla="val 30000"/>
+            </a:avLst>
+          </a:prstGeom>
+          <a:solidFill>
+            <a:srgbClr val="009688"/>
+          </a:solidFill>
+          <a:ln>
+            <a:noFill/>
+          </a:ln>
+        </p:spPr>
+        <p:style>
+          <a:lnRef idx="1">
+            <a:schemeClr val="accent1"/>
+          </a:lnRef>
+          <a:fillRef idx="3">
+            <a:schemeClr val="accent1"/>
+          </a:fillRef>
+          <a:effectRef idx="2">
+            <a:schemeClr val="accent1"/>
+          </a:effectRef>
+          <a:fontRef idx="minor">
+            <a:schemeClr val="lt1"/>
+          </a:fontRef>
+        </p:style>
+        <p:txBody>
+          <a:bodyPr rtlCol="0" anchor="ctr"/>
+          <a:lstStyle/>
+          <a:p>
+            <a:pPr algn="ctr"/>
+            <a:r>
+              <a:rPr sz="1000" b="1">
                 <a:solidFill>
                   <a:srgbClr val="FFFFFF"/>
                 </a:solidFill>
                 <a:latin typeface="Times New Roman"/>
-              </a:defRPr>
-            </a:pPr>
-            <a:r>
-              <a:t>🚀</a:t>
-            </a:r>
-          </a:p>
-        </p:txBody>
-      </p:sp>
-      <p:sp>
-        <p:nvSpPr>
-          <p:cNvPr id="8" name="Rectangle 7"/>
+              </a:rPr>
+              <a:t>📚 SGK</a:t>
+            </a:r>
+          </a:p>
+        </p:txBody>
+      </p:sp>
+      <p:sp>
+        <p:nvSpPr>
+          <p:cNvPr id="9" name="Rectangle 8"/>
           <p:cNvSpPr/>
           <p:nvPr/>
         </p:nvSpPr>
@@ -5512,7 +5773,7 @@
       </p:sp>
       <p:sp>
         <p:nvSpPr>
-          <p:cNvPr id="9" name="TextBox 8"/>
+          <p:cNvPr id="10" name="TextBox 9"/>
           <p:cNvSpPr txBox="1"/>
           <p:nvPr/>
         </p:nvSpPr>
@@ -5579,8 +5840,8 @@
         </p:nvSpPr>
         <p:spPr>
           <a:xfrm>
-            <a:off x="472440" y="1188720"/>
-            <a:ext cx="11247120" cy="4389120"/>
+            <a:off x="320040" y="1188720"/>
+            <a:ext cx="7315200" cy="4389120"/>
           </a:xfrm>
           <a:prstGeom prst="roundRect">
             <a:avLst>
@@ -5631,7 +5892,7 @@
         </p:nvSpPr>
         <p:spPr>
           <a:xfrm>
-            <a:off x="472440" y="1188720"/>
+            <a:off x="320040" y="1188720"/>
             <a:ext cx="109728" cy="4389120"/>
           </a:xfrm>
           <a:prstGeom prst="rect">
@@ -5674,8 +5935,8 @@
         </p:nvSpPr>
         <p:spPr>
           <a:xfrm>
-            <a:off x="929640" y="1371600"/>
-            <a:ext cx="10058400" cy="457200"/>
+            <a:off x="777240" y="1371600"/>
+            <a:ext cx="6400800" cy="457200"/>
           </a:xfrm>
           <a:prstGeom prst="rect">
             <a:avLst/>
@@ -5710,8 +5971,8 @@
         </p:nvSpPr>
         <p:spPr>
           <a:xfrm>
-            <a:off x="929640" y="2011680"/>
-            <a:ext cx="10058400" cy="3291840"/>
+            <a:off x="777240" y="2011680"/>
+            <a:ext cx="6400800" cy="3291840"/>
           </a:xfrm>
           <a:prstGeom prst="rect">
             <a:avLst/>
@@ -5837,9 +6098,33 @@
           </a:p>
         </p:txBody>
       </p:sp>
-      <p:sp>
-        <p:nvSpPr>
-          <p:cNvPr id="6" name="Rectangle 5"/>
+      <p:pic>
+        <p:nvPicPr>
+          <p:cNvPr id="6" name="Picture 5" descr="bai1_page9.png"/>
+          <p:cNvPicPr>
+            <a:picLocks noChangeAspect="1"/>
+          </p:cNvPicPr>
+          <p:nvPr/>
+        </p:nvPicPr>
+        <p:blipFill>
+          <a:blip r:embed="rId2"/>
+          <a:stretch>
+            <a:fillRect/>
+          </a:stretch>
+        </p:blipFill>
+        <p:spPr>
+          <a:xfrm>
+            <a:off x="8333525" y="1188720"/>
+            <a:ext cx="3068749" cy="4389120"/>
+          </a:xfrm>
+          <a:prstGeom prst="rect">
+            <a:avLst/>
+          </a:prstGeom>
+        </p:spPr>
+      </p:pic>
+      <p:sp>
+        <p:nvSpPr>
+          <p:cNvPr id="7" name="Rectangle 6"/>
           <p:cNvSpPr/>
           <p:nvPr/>
         </p:nvSpPr>
@@ -5882,7 +6167,7 @@
       </p:sp>
       <p:sp>
         <p:nvSpPr>
-          <p:cNvPr id="7" name="TextBox 6"/>
+          <p:cNvPr id="8" name="TextBox 7"/>
           <p:cNvSpPr txBox="1"/>
           <p:nvPr/>
         </p:nvSpPr>
@@ -5941,9 +6226,78 @@
         <p:nvPr/>
       </p:nvGrpSpPr>
       <p:grpSpPr/>
-      <p:sp>
-        <p:nvSpPr>
-          <p:cNvPr id="2" name="Rounded Rectangle 1"/>
+      <p:pic>
+        <p:nvPicPr>
+          <p:cNvPr id="2" name="Picture 1" descr="bai1_page11.png"/>
+          <p:cNvPicPr>
+            <a:picLocks noChangeAspect="1"/>
+          </p:cNvPicPr>
+          <p:nvPr/>
+        </p:nvPicPr>
+        <p:blipFill>
+          <a:blip r:embed="rId2"/>
+          <a:stretch>
+            <a:fillRect/>
+          </a:stretch>
+        </p:blipFill>
+        <p:spPr>
+          <a:xfrm>
+            <a:off x="8010323" y="1371600"/>
+            <a:ext cx="2876953" cy="4114800"/>
+          </a:xfrm>
+          <a:prstGeom prst="rect">
+            <a:avLst/>
+          </a:prstGeom>
+        </p:spPr>
+      </p:pic>
+      <p:sp>
+        <p:nvSpPr>
+          <p:cNvPr id="3" name="Rectangle 2"/>
+          <p:cNvSpPr/>
+          <p:nvPr/>
+        </p:nvSpPr>
+        <p:spPr>
+          <a:xfrm>
+            <a:off x="7162800" y="1371600"/>
+            <a:ext cx="4572000" cy="4114800"/>
+          </a:xfrm>
+          <a:prstGeom prst="rect">
+            <a:avLst/>
+          </a:prstGeom>
+          <a:solidFill>
+            <a:srgbClr val="009688">
+              <a:alpha val="50000"/>
+            </a:srgbClr>
+          </a:solidFill>
+          <a:ln>
+            <a:noFill/>
+          </a:ln>
+        </p:spPr>
+        <p:style>
+          <a:lnRef idx="1">
+            <a:schemeClr val="accent1"/>
+          </a:lnRef>
+          <a:fillRef idx="3">
+            <a:schemeClr val="accent1"/>
+          </a:fillRef>
+          <a:effectRef idx="2">
+            <a:schemeClr val="accent1"/>
+          </a:effectRef>
+          <a:fontRef idx="minor">
+            <a:schemeClr val="lt1"/>
+          </a:fontRef>
+        </p:style>
+        <p:txBody>
+          <a:bodyPr rtlCol="0" anchor="ctr"/>
+          <a:lstStyle/>
+          <a:p>
+            <a:pPr algn="ctr"/>
+          </a:p>
+        </p:txBody>
+      </p:sp>
+      <p:sp>
+        <p:nvSpPr>
+          <p:cNvPr id="4" name="Rounded Rectangle 3"/>
           <p:cNvSpPr/>
           <p:nvPr/>
         </p:nvSpPr>
@@ -5988,7 +6342,7 @@
       </p:sp>
       <p:sp>
         <p:nvSpPr>
-          <p:cNvPr id="3" name="TextBox 2"/>
+          <p:cNvPr id="5" name="TextBox 4"/>
           <p:cNvSpPr txBox="1"/>
           <p:nvPr/>
         </p:nvSpPr>
@@ -6039,7 +6393,7 @@
       </p:sp>
       <p:sp>
         <p:nvSpPr>
-          <p:cNvPr id="4" name="TextBox 3"/>
+          <p:cNvPr id="6" name="TextBox 5"/>
           <p:cNvSpPr txBox="1"/>
           <p:nvPr/>
         </p:nvSpPr>
@@ -6074,7 +6428,7 @@
       </p:sp>
       <p:sp>
         <p:nvSpPr>
-          <p:cNvPr id="5" name="Rectangle 4"/>
+          <p:cNvPr id="7" name="Rectangle 6"/>
           <p:cNvSpPr/>
           <p:nvPr/>
         </p:nvSpPr>
@@ -6117,7 +6471,7 @@
       </p:sp>
       <p:sp>
         <p:nvSpPr>
-          <p:cNvPr id="6" name="TextBox 5"/>
+          <p:cNvPr id="8" name="TextBox 7"/>
           <p:cNvSpPr txBox="1"/>
           <p:nvPr/>
         </p:nvSpPr>
